--- a/class/cloud_infra_mgmt/07주차_Kubernetes핵심3/01_강의자료/3차시_자가치유실습과주차정리.pptx
+++ b/class/cloud_infra_mgmt/07주차_Kubernetes핵심3/01_강의자료/3차시_자가치유실습과주차정리.pptx
@@ -10442,7 +10442,7 @@
               </a:lnSpc>
             </a:pPr>
             <a:r>
-              <a:rPr sz="1500" b="1">
+              <a:rPr sz="1700" b="1">
                 <a:solidFill>
                   <a:srgbClr val="0D9488"/>
                 </a:solidFill>
@@ -10451,7 +10451,7 @@
               <a:t>●  </a:t>
             </a:r>
             <a:r>
-              <a:rPr sz="1500" b="0">
+              <a:rPr sz="1700" b="0">
                 <a:solidFill>
                   <a:srgbClr val="222733"/>
                 </a:solidFill>
@@ -10467,7 +10467,7 @@
               </a:lnSpc>
             </a:pPr>
             <a:r>
-              <a:rPr sz="1500" b="1">
+              <a:rPr sz="1700" b="1">
                 <a:solidFill>
                   <a:srgbClr val="0D9488"/>
                 </a:solidFill>
@@ -10476,7 +10476,7 @@
               <a:t>●  </a:t>
             </a:r>
             <a:r>
-              <a:rPr sz="1500" b="0">
+              <a:rPr sz="1700" b="0">
                 <a:solidFill>
                   <a:srgbClr val="222733"/>
                 </a:solidFill>
@@ -10492,7 +10492,7 @@
               </a:lnSpc>
             </a:pPr>
             <a:r>
-              <a:rPr sz="1500" b="1">
+              <a:rPr sz="1700" b="1">
                 <a:solidFill>
                   <a:srgbClr val="0D9488"/>
                 </a:solidFill>
@@ -10501,7 +10501,7 @@
               <a:t>●  </a:t>
             </a:r>
             <a:r>
-              <a:rPr sz="1500" b="0">
+              <a:rPr sz="1700" b="0">
                 <a:solidFill>
                   <a:srgbClr val="222733"/>
                 </a:solidFill>

--- a/class/cloud_infra_mgmt/07주차_Kubernetes핵심3/01_강의자료/3차시_자가치유실습과주차정리.pptx
+++ b/class/cloud_infra_mgmt/07주차_Kubernetes핵심3/01_강의자료/3차시_자가치유실습과주차정리.pptx
@@ -5267,7 +5267,7 @@
           <a:p>
             <a:pPr>
               <a:lnSpc>
-                <a:spcPct val="115000"/>
+                <a:spcPct val="149500"/>
               </a:lnSpc>
             </a:pPr>
             <a:r>
@@ -5292,13 +5292,13 @@
           <a:p>
             <a:pPr>
               <a:lnSpc>
-                <a:spcPct val="115000"/>
+                <a:spcPct val="149500"/>
               </a:lnSpc>
             </a:pPr>
             <a:r>
               <a:rPr sz="1700" b="1">
                 <a:solidFill>
-                  <a:srgbClr val="0D9488"/>
+                  <a:srgbClr val="DC2626"/>
                 </a:solidFill>
                 <a:latin typeface="맑은 고딕"/>
               </a:rPr>
@@ -5311,13 +5311,13 @@
                 </a:solidFill>
                 <a:latin typeface="맑은 고딕"/>
               </a:rPr>
-              <a:t>⚠ minikube 재시작 직후라면 Ingress 컨트롤러 준비까지 10~20초 대기 필요</a:t>
+              <a:t>minikube 재시작 직후라면 Ingress 컨트롤러 준비까지 10~20초 대기 필요</a:t>
             </a:r>
           </a:p>
           <a:p>
             <a:pPr>
               <a:lnSpc>
-                <a:spcPct val="115000"/>
+                <a:spcPct val="149500"/>
               </a:lnSpc>
             </a:pPr>
             <a:r>
@@ -8036,16 +8036,104 @@
       </p:sp>
       <p:sp>
         <p:nvSpPr>
-          <p:cNvPr id="7" name="Isosceles Triangle 6"/>
+          <p:cNvPr id="7" name="Rectangle 6"/>
           <p:cNvSpPr/>
           <p:nvPr/>
         </p:nvSpPr>
         <p:spPr>
-          <a:xfrm rot="5400000">
-            <a:off x="3495751" y="1673352"/>
-            <a:ext cx="146304" cy="146304"/>
-          </a:xfrm>
-          <a:prstGeom prst="triangle">
+          <a:xfrm>
+            <a:off x="5096865" y="1730959"/>
+            <a:ext cx="1995220" cy="31089"/>
+          </a:xfrm>
+          <a:prstGeom prst="rect">
+            <a:avLst/>
+          </a:prstGeom>
+          <a:solidFill>
+            <a:srgbClr val="14B8A6"/>
+          </a:solidFill>
+          <a:ln>
+            <a:noFill/>
+          </a:ln>
+          <a:effectLst/>
+        </p:spPr>
+        <p:style>
+          <a:lnRef idx="1">
+            <a:schemeClr val="accent1"/>
+          </a:lnRef>
+          <a:fillRef idx="3">
+            <a:schemeClr val="accent1"/>
+          </a:fillRef>
+          <a:effectRef idx="2">
+            <a:schemeClr val="accent1"/>
+          </a:effectRef>
+          <a:fontRef idx="minor">
+            <a:schemeClr val="lt1"/>
+          </a:fontRef>
+        </p:style>
+        <p:txBody>
+          <a:bodyPr rtlCol="0" anchor="ctr"/>
+          <a:lstStyle/>
+          <a:p>
+            <a:pPr algn="ctr"/>
+          </a:p>
+        </p:txBody>
+      </p:sp>
+      <p:sp>
+        <p:nvSpPr>
+          <p:cNvPr id="8" name="Rectangle 7"/>
+          <p:cNvSpPr/>
+          <p:nvPr/>
+        </p:nvSpPr>
+        <p:spPr>
+          <a:xfrm>
+            <a:off x="7622438" y="1730959"/>
+            <a:ext cx="1995220" cy="31089"/>
+          </a:xfrm>
+          <a:prstGeom prst="rect">
+            <a:avLst/>
+          </a:prstGeom>
+          <a:solidFill>
+            <a:srgbClr val="14B8A6"/>
+          </a:solidFill>
+          <a:ln>
+            <a:noFill/>
+          </a:ln>
+          <a:effectLst/>
+        </p:spPr>
+        <p:style>
+          <a:lnRef idx="1">
+            <a:schemeClr val="accent1"/>
+          </a:lnRef>
+          <a:fillRef idx="3">
+            <a:schemeClr val="accent1"/>
+          </a:fillRef>
+          <a:effectRef idx="2">
+            <a:schemeClr val="accent1"/>
+          </a:effectRef>
+          <a:fontRef idx="minor">
+            <a:schemeClr val="lt1"/>
+          </a:fontRef>
+        </p:style>
+        <p:txBody>
+          <a:bodyPr rtlCol="0" anchor="ctr"/>
+          <a:lstStyle/>
+          <a:p>
+            <a:pPr algn="ctr"/>
+          </a:p>
+        </p:txBody>
+      </p:sp>
+      <p:sp>
+        <p:nvSpPr>
+          <p:cNvPr id="9" name="Oval 8"/>
+          <p:cNvSpPr/>
+          <p:nvPr/>
+        </p:nvSpPr>
+        <p:spPr>
+          <a:xfrm>
+            <a:off x="2040940" y="1481328"/>
+            <a:ext cx="530352" cy="530352"/>
+          </a:xfrm>
+          <a:prstGeom prst="ellipse">
             <a:avLst/>
           </a:prstGeom>
           <a:solidFill>
@@ -8080,227 +8168,7 @@
       </p:sp>
       <p:sp>
         <p:nvSpPr>
-          <p:cNvPr id="8" name="Rectangle 7"/>
-          <p:cNvSpPr/>
-          <p:nvPr/>
-        </p:nvSpPr>
-        <p:spPr>
-          <a:xfrm>
-            <a:off x="5096865" y="1730959"/>
-            <a:ext cx="1995220" cy="31089"/>
-          </a:xfrm>
-          <a:prstGeom prst="rect">
-            <a:avLst/>
-          </a:prstGeom>
-          <a:solidFill>
-            <a:srgbClr val="14B8A6"/>
-          </a:solidFill>
-          <a:ln>
-            <a:noFill/>
-          </a:ln>
-          <a:effectLst/>
-        </p:spPr>
-        <p:style>
-          <a:lnRef idx="1">
-            <a:schemeClr val="accent1"/>
-          </a:lnRef>
-          <a:fillRef idx="3">
-            <a:schemeClr val="accent1"/>
-          </a:fillRef>
-          <a:effectRef idx="2">
-            <a:schemeClr val="accent1"/>
-          </a:effectRef>
-          <a:fontRef idx="minor">
-            <a:schemeClr val="lt1"/>
-          </a:fontRef>
-        </p:style>
-        <p:txBody>
-          <a:bodyPr rtlCol="0" anchor="ctr"/>
-          <a:lstStyle/>
-          <a:p>
-            <a:pPr algn="ctr"/>
-          </a:p>
-        </p:txBody>
-      </p:sp>
-      <p:sp>
-        <p:nvSpPr>
-          <p:cNvPr id="9" name="Isosceles Triangle 8"/>
-          <p:cNvSpPr/>
-          <p:nvPr/>
-        </p:nvSpPr>
-        <p:spPr>
-          <a:xfrm rot="5400000">
-            <a:off x="6021324" y="1673352"/>
-            <a:ext cx="146304" cy="146304"/>
-          </a:xfrm>
-          <a:prstGeom prst="triangle">
-            <a:avLst/>
-          </a:prstGeom>
-          <a:solidFill>
-            <a:srgbClr val="0D9488"/>
-          </a:solidFill>
-          <a:ln>
-            <a:noFill/>
-          </a:ln>
-          <a:effectLst/>
-        </p:spPr>
-        <p:style>
-          <a:lnRef idx="1">
-            <a:schemeClr val="accent1"/>
-          </a:lnRef>
-          <a:fillRef idx="3">
-            <a:schemeClr val="accent1"/>
-          </a:fillRef>
-          <a:effectRef idx="2">
-            <a:schemeClr val="accent1"/>
-          </a:effectRef>
-          <a:fontRef idx="minor">
-            <a:schemeClr val="lt1"/>
-          </a:fontRef>
-        </p:style>
-        <p:txBody>
-          <a:bodyPr rtlCol="0" anchor="ctr"/>
-          <a:lstStyle/>
-          <a:p>
-            <a:pPr algn="ctr"/>
-          </a:p>
-        </p:txBody>
-      </p:sp>
-      <p:sp>
-        <p:nvSpPr>
-          <p:cNvPr id="10" name="Rectangle 9"/>
-          <p:cNvSpPr/>
-          <p:nvPr/>
-        </p:nvSpPr>
-        <p:spPr>
-          <a:xfrm>
-            <a:off x="7622438" y="1730959"/>
-            <a:ext cx="1995220" cy="31089"/>
-          </a:xfrm>
-          <a:prstGeom prst="rect">
-            <a:avLst/>
-          </a:prstGeom>
-          <a:solidFill>
-            <a:srgbClr val="14B8A6"/>
-          </a:solidFill>
-          <a:ln>
-            <a:noFill/>
-          </a:ln>
-          <a:effectLst/>
-        </p:spPr>
-        <p:style>
-          <a:lnRef idx="1">
-            <a:schemeClr val="accent1"/>
-          </a:lnRef>
-          <a:fillRef idx="3">
-            <a:schemeClr val="accent1"/>
-          </a:fillRef>
-          <a:effectRef idx="2">
-            <a:schemeClr val="accent1"/>
-          </a:effectRef>
-          <a:fontRef idx="minor">
-            <a:schemeClr val="lt1"/>
-          </a:fontRef>
-        </p:style>
-        <p:txBody>
-          <a:bodyPr rtlCol="0" anchor="ctr"/>
-          <a:lstStyle/>
-          <a:p>
-            <a:pPr algn="ctr"/>
-          </a:p>
-        </p:txBody>
-      </p:sp>
-      <p:sp>
-        <p:nvSpPr>
-          <p:cNvPr id="11" name="Isosceles Triangle 10"/>
-          <p:cNvSpPr/>
-          <p:nvPr/>
-        </p:nvSpPr>
-        <p:spPr>
-          <a:xfrm rot="5400000">
-            <a:off x="8546896" y="1673352"/>
-            <a:ext cx="146304" cy="146304"/>
-          </a:xfrm>
-          <a:prstGeom prst="triangle">
-            <a:avLst/>
-          </a:prstGeom>
-          <a:solidFill>
-            <a:srgbClr val="0D9488"/>
-          </a:solidFill>
-          <a:ln>
-            <a:noFill/>
-          </a:ln>
-          <a:effectLst/>
-        </p:spPr>
-        <p:style>
-          <a:lnRef idx="1">
-            <a:schemeClr val="accent1"/>
-          </a:lnRef>
-          <a:fillRef idx="3">
-            <a:schemeClr val="accent1"/>
-          </a:fillRef>
-          <a:effectRef idx="2">
-            <a:schemeClr val="accent1"/>
-          </a:effectRef>
-          <a:fontRef idx="minor">
-            <a:schemeClr val="lt1"/>
-          </a:fontRef>
-        </p:style>
-        <p:txBody>
-          <a:bodyPr rtlCol="0" anchor="ctr"/>
-          <a:lstStyle/>
-          <a:p>
-            <a:pPr algn="ctr"/>
-          </a:p>
-        </p:txBody>
-      </p:sp>
-      <p:sp>
-        <p:nvSpPr>
-          <p:cNvPr id="12" name="Oval 11"/>
-          <p:cNvSpPr/>
-          <p:nvPr/>
-        </p:nvSpPr>
-        <p:spPr>
-          <a:xfrm>
-            <a:off x="2040940" y="1481328"/>
-            <a:ext cx="530352" cy="530352"/>
-          </a:xfrm>
-          <a:prstGeom prst="ellipse">
-            <a:avLst/>
-          </a:prstGeom>
-          <a:solidFill>
-            <a:srgbClr val="0D9488"/>
-          </a:solidFill>
-          <a:ln>
-            <a:noFill/>
-          </a:ln>
-          <a:effectLst/>
-        </p:spPr>
-        <p:style>
-          <a:lnRef idx="1">
-            <a:schemeClr val="accent1"/>
-          </a:lnRef>
-          <a:fillRef idx="3">
-            <a:schemeClr val="accent1"/>
-          </a:fillRef>
-          <a:effectRef idx="2">
-            <a:schemeClr val="accent1"/>
-          </a:effectRef>
-          <a:fontRef idx="minor">
-            <a:schemeClr val="lt1"/>
-          </a:fontRef>
-        </p:style>
-        <p:txBody>
-          <a:bodyPr rtlCol="0" anchor="ctr"/>
-          <a:lstStyle/>
-          <a:p>
-            <a:pPr algn="ctr"/>
-          </a:p>
-        </p:txBody>
-      </p:sp>
-      <p:sp>
-        <p:nvSpPr>
-          <p:cNvPr id="13" name="TextBox 12"/>
+          <p:cNvPr id="10" name="TextBox 9"/>
           <p:cNvSpPr txBox="1"/>
           <p:nvPr/>
         </p:nvSpPr>
@@ -8335,7 +8203,7 @@
       </p:sp>
       <p:sp>
         <p:nvSpPr>
-          <p:cNvPr id="14" name="Rounded Rectangle 13"/>
+          <p:cNvPr id="11" name="Rounded Rectangle 10"/>
           <p:cNvSpPr/>
           <p:nvPr/>
         </p:nvSpPr>
@@ -8383,7 +8251,7 @@
       </p:sp>
       <p:sp>
         <p:nvSpPr>
-          <p:cNvPr id="15" name="TextBox 14"/>
+          <p:cNvPr id="12" name="TextBox 11"/>
           <p:cNvSpPr txBox="1"/>
           <p:nvPr/>
         </p:nvSpPr>
@@ -8418,7 +8286,7 @@
       </p:sp>
       <p:sp>
         <p:nvSpPr>
-          <p:cNvPr id="16" name="TextBox 15"/>
+          <p:cNvPr id="13" name="TextBox 12"/>
           <p:cNvSpPr txBox="1"/>
           <p:nvPr/>
         </p:nvSpPr>
@@ -8457,7 +8325,7 @@
       </p:sp>
       <p:sp>
         <p:nvSpPr>
-          <p:cNvPr id="17" name="Oval 16"/>
+          <p:cNvPr id="14" name="Oval 13"/>
           <p:cNvSpPr/>
           <p:nvPr/>
         </p:nvSpPr>
@@ -8501,7 +8369,7 @@
       </p:sp>
       <p:sp>
         <p:nvSpPr>
-          <p:cNvPr id="18" name="TextBox 17"/>
+          <p:cNvPr id="15" name="TextBox 14"/>
           <p:cNvSpPr txBox="1"/>
           <p:nvPr/>
         </p:nvSpPr>
@@ -8536,7 +8404,7 @@
       </p:sp>
       <p:sp>
         <p:nvSpPr>
-          <p:cNvPr id="19" name="Rounded Rectangle 18"/>
+          <p:cNvPr id="16" name="Rounded Rectangle 15"/>
           <p:cNvSpPr/>
           <p:nvPr/>
         </p:nvSpPr>
@@ -8584,7 +8452,7 @@
       </p:sp>
       <p:sp>
         <p:nvSpPr>
-          <p:cNvPr id="20" name="TextBox 19"/>
+          <p:cNvPr id="17" name="TextBox 16"/>
           <p:cNvSpPr txBox="1"/>
           <p:nvPr/>
         </p:nvSpPr>
@@ -8619,7 +8487,7 @@
       </p:sp>
       <p:sp>
         <p:nvSpPr>
-          <p:cNvPr id="21" name="TextBox 20"/>
+          <p:cNvPr id="18" name="TextBox 17"/>
           <p:cNvSpPr txBox="1"/>
           <p:nvPr/>
         </p:nvSpPr>
@@ -8658,7 +8526,7 @@
       </p:sp>
       <p:sp>
         <p:nvSpPr>
-          <p:cNvPr id="22" name="Oval 21"/>
+          <p:cNvPr id="19" name="Oval 18"/>
           <p:cNvSpPr/>
           <p:nvPr/>
         </p:nvSpPr>
@@ -8702,7 +8570,7 @@
       </p:sp>
       <p:sp>
         <p:nvSpPr>
-          <p:cNvPr id="23" name="TextBox 22"/>
+          <p:cNvPr id="20" name="TextBox 19"/>
           <p:cNvSpPr txBox="1"/>
           <p:nvPr/>
         </p:nvSpPr>
@@ -8737,7 +8605,7 @@
       </p:sp>
       <p:sp>
         <p:nvSpPr>
-          <p:cNvPr id="24" name="Rounded Rectangle 23"/>
+          <p:cNvPr id="21" name="Rounded Rectangle 20"/>
           <p:cNvSpPr/>
           <p:nvPr/>
         </p:nvSpPr>
@@ -8785,7 +8653,7 @@
       </p:sp>
       <p:sp>
         <p:nvSpPr>
-          <p:cNvPr id="25" name="TextBox 24"/>
+          <p:cNvPr id="22" name="TextBox 21"/>
           <p:cNvSpPr txBox="1"/>
           <p:nvPr/>
         </p:nvSpPr>
@@ -8820,7 +8688,7 @@
       </p:sp>
       <p:sp>
         <p:nvSpPr>
-          <p:cNvPr id="26" name="TextBox 25"/>
+          <p:cNvPr id="23" name="TextBox 22"/>
           <p:cNvSpPr txBox="1"/>
           <p:nvPr/>
         </p:nvSpPr>
@@ -8859,7 +8727,7 @@
       </p:sp>
       <p:sp>
         <p:nvSpPr>
-          <p:cNvPr id="27" name="Oval 26"/>
+          <p:cNvPr id="24" name="Oval 23"/>
           <p:cNvSpPr/>
           <p:nvPr/>
         </p:nvSpPr>
@@ -8903,7 +8771,7 @@
       </p:sp>
       <p:sp>
         <p:nvSpPr>
-          <p:cNvPr id="28" name="TextBox 27"/>
+          <p:cNvPr id="25" name="TextBox 24"/>
           <p:cNvSpPr txBox="1"/>
           <p:nvPr/>
         </p:nvSpPr>
@@ -8938,7 +8806,7 @@
       </p:sp>
       <p:sp>
         <p:nvSpPr>
-          <p:cNvPr id="29" name="Rounded Rectangle 28"/>
+          <p:cNvPr id="26" name="Rounded Rectangle 25"/>
           <p:cNvSpPr/>
           <p:nvPr/>
         </p:nvSpPr>
@@ -8986,7 +8854,7 @@
       </p:sp>
       <p:sp>
         <p:nvSpPr>
-          <p:cNvPr id="30" name="TextBox 29"/>
+          <p:cNvPr id="27" name="TextBox 26"/>
           <p:cNvSpPr txBox="1"/>
           <p:nvPr/>
         </p:nvSpPr>
@@ -9021,7 +8889,7 @@
       </p:sp>
       <p:sp>
         <p:nvSpPr>
-          <p:cNvPr id="31" name="TextBox 30"/>
+          <p:cNvPr id="28" name="TextBox 27"/>
           <p:cNvSpPr txBox="1"/>
           <p:nvPr/>
         </p:nvSpPr>
@@ -9060,7 +8928,7 @@
       </p:sp>
       <p:sp>
         <p:nvSpPr>
-          <p:cNvPr id="32" name="TextBox 31"/>
+          <p:cNvPr id="29" name="TextBox 28"/>
           <p:cNvSpPr txBox="1"/>
           <p:nvPr/>
         </p:nvSpPr>
@@ -9095,7 +8963,7 @@
       </p:sp>
       <p:sp>
         <p:nvSpPr>
-          <p:cNvPr id="33" name="TextBox 32"/>
+          <p:cNvPr id="30" name="TextBox 29"/>
           <p:cNvSpPr txBox="1"/>
           <p:nvPr/>
         </p:nvSpPr>
@@ -9130,7 +8998,7 @@
       </p:sp>
       <p:sp>
         <p:nvSpPr>
-          <p:cNvPr id="34" name="Rectangle 33"/>
+          <p:cNvPr id="31" name="Rectangle 30"/>
           <p:cNvSpPr/>
           <p:nvPr/>
         </p:nvSpPr>
@@ -9654,7 +9522,7 @@
           <a:p>
             <a:pPr>
               <a:lnSpc>
-                <a:spcPct val="115000"/>
+                <a:spcPct val="149500"/>
               </a:lnSpc>
             </a:pPr>
             <a:r>
@@ -9679,7 +9547,7 @@
           <a:p>
             <a:pPr>
               <a:lnSpc>
-                <a:spcPct val="115000"/>
+                <a:spcPct val="149500"/>
               </a:lnSpc>
             </a:pPr>
             <a:r>
@@ -9704,7 +9572,7 @@
           <a:p>
             <a:pPr>
               <a:lnSpc>
-                <a:spcPct val="115000"/>
+                <a:spcPct val="149500"/>
               </a:lnSpc>
             </a:pPr>
             <a:r>
@@ -10438,7 +10306,7 @@
           <a:p>
             <a:pPr>
               <a:lnSpc>
-                <a:spcPct val="115000"/>
+                <a:spcPct val="149500"/>
               </a:lnSpc>
             </a:pPr>
             <a:r>
@@ -10463,7 +10331,7 @@
           <a:p>
             <a:pPr>
               <a:lnSpc>
-                <a:spcPct val="115000"/>
+                <a:spcPct val="149500"/>
               </a:lnSpc>
             </a:pPr>
             <a:r>
@@ -10488,7 +10356,7 @@
           <a:p>
             <a:pPr>
               <a:lnSpc>
-                <a:spcPct val="115000"/>
+                <a:spcPct val="149500"/>
               </a:lnSpc>
             </a:pPr>
             <a:r>
@@ -11151,7 +11019,7 @@
           <a:p>
             <a:pPr>
               <a:lnSpc>
-                <a:spcPct val="115000"/>
+                <a:spcPct val="149500"/>
               </a:lnSpc>
             </a:pPr>
             <a:r>
@@ -11176,7 +11044,7 @@
           <a:p>
             <a:pPr>
               <a:lnSpc>
-                <a:spcPct val="115000"/>
+                <a:spcPct val="149500"/>
               </a:lnSpc>
             </a:pPr>
             <a:r>
@@ -11201,7 +11069,7 @@
           <a:p>
             <a:pPr>
               <a:lnSpc>
-                <a:spcPct val="115000"/>
+                <a:spcPct val="149500"/>
               </a:lnSpc>
             </a:pPr>
             <a:r>
@@ -11592,7 +11460,7 @@
           <a:p>
             <a:pPr>
               <a:lnSpc>
-                <a:spcPct val="115000"/>
+                <a:spcPct val="149500"/>
               </a:lnSpc>
             </a:pPr>
             <a:r>
@@ -11617,7 +11485,7 @@
           <a:p>
             <a:pPr>
               <a:lnSpc>
-                <a:spcPct val="115000"/>
+                <a:spcPct val="149500"/>
               </a:lnSpc>
             </a:pPr>
             <a:r>
@@ -11642,7 +11510,7 @@
           <a:p>
             <a:pPr>
               <a:lnSpc>
-                <a:spcPct val="115000"/>
+                <a:spcPct val="149500"/>
               </a:lnSpc>
             </a:pPr>
             <a:r>

--- a/class/cloud_infra_mgmt/07주차_Kubernetes핵심3/01_강의자료/3차시_자가치유실습과주차정리.pptx
+++ b/class/cloud_infra_mgmt/07주차_Kubernetes핵심3/01_강의자료/3차시_자가치유실습과주차정리.pptx
@@ -4903,6 +4903,8 @@
                   <a:srgbClr val="14B8A6"/>
                 </a:solidFill>
                 <a:latin typeface="맑은 고딕"/>
+                <a:ea typeface="맑은 고딕"/>
+                <a:cs typeface="맑은 고딕"/>
               </a:rPr>
               <a:t>클라우드인프라관리  ·  7주차 3차시</a:t>
             </a:r>
@@ -4938,6 +4940,8 @@
                   <a:srgbClr val="FFFFFF"/>
                 </a:solidFill>
                 <a:latin typeface="맑은 고딕"/>
+                <a:ea typeface="맑은 고딕"/>
+                <a:cs typeface="맑은 고딕"/>
               </a:rPr>
               <a:t>자가치유 실습과 4~7주 정리</a:t>
             </a:r>
@@ -4973,6 +4977,8 @@
                   <a:srgbClr val="C9D3E6"/>
                 </a:solidFill>
                 <a:latin typeface="맑은 고딕"/>
+                <a:ea typeface="맑은 고딕"/>
+                <a:cs typeface="맑은 고딕"/>
               </a:rPr>
               <a:t>K8s가 스스로 복구하는 능력을 확인하다</a:t>
             </a:r>
@@ -5008,6 +5014,8 @@
                   <a:srgbClr val="FFFFFF"/>
                 </a:solidFill>
                 <a:latin typeface="맑은 고딕"/>
+                <a:ea typeface="맑은 고딕"/>
+                <a:cs typeface="맑은 고딕"/>
               </a:rPr>
               <a:t>영남이공대학교 김지윤교수</a:t>
             </a:r>
@@ -5167,6 +5175,8 @@
                   <a:srgbClr val="14213D"/>
                 </a:solidFill>
                 <a:latin typeface="맑은 고딕"/>
+                <a:ea typeface="맑은 고딕"/>
+                <a:cs typeface="맑은 고딕"/>
               </a:rPr>
               <a:t>03</a:t>
             </a:r>
@@ -5202,6 +5212,8 @@
                   <a:srgbClr val="14B8A6"/>
                 </a:solidFill>
                 <a:latin typeface="맑은 고딕"/>
+                <a:ea typeface="맑은 고딕"/>
+                <a:cs typeface="맑은 고딕"/>
               </a:rPr>
               <a:t>실습 안내</a:t>
             </a:r>
@@ -5237,6 +5249,8 @@
                   <a:srgbClr val="FFFFFF"/>
                 </a:solidFill>
                 <a:latin typeface="맑은 고딕"/>
+                <a:ea typeface="맑은 고딕"/>
+                <a:cs typeface="맑은 고딕"/>
               </a:rPr>
               <a:t>VM 안내 및 4~7주 종합 제출</a:t>
             </a:r>
@@ -5276,6 +5290,8 @@
                   <a:srgbClr val="0D9488"/>
                 </a:solidFill>
                 <a:latin typeface="맑은 고딕"/>
+                <a:ea typeface="맑은 고딕"/>
+                <a:cs typeface="맑은 고딕"/>
               </a:rPr>
               <a:t>●  </a:t>
             </a:r>
@@ -5285,6 +5301,8 @@
                   <a:srgbClr val="222733"/>
                 </a:solidFill>
                 <a:latin typeface="맑은 고딕"/>
+                <a:ea typeface="맑은 고딕"/>
+                <a:cs typeface="맑은 고딕"/>
               </a:rPr>
               <a:t>개인 VM에서 동일하게 Pod 강제 삭제 후 자동 복구 과정 캡처</a:t>
             </a:r>
@@ -5301,6 +5319,8 @@
                   <a:srgbClr val="DC2626"/>
                 </a:solidFill>
                 <a:latin typeface="맑은 고딕"/>
+                <a:ea typeface="맑은 고딕"/>
+                <a:cs typeface="맑은 고딕"/>
               </a:rPr>
               <a:t>●  </a:t>
             </a:r>
@@ -5310,6 +5330,8 @@
                   <a:srgbClr val="222733"/>
                 </a:solidFill>
                 <a:latin typeface="맑은 고딕"/>
+                <a:ea typeface="맑은 고딕"/>
+                <a:cs typeface="맑은 고딕"/>
               </a:rPr>
               <a:t>minikube 재시작 직후라면 Ingress 컨트롤러 준비까지 10~20초 대기 필요</a:t>
             </a:r>
@@ -5326,6 +5348,8 @@
                   <a:srgbClr val="0D9488"/>
                 </a:solidFill>
                 <a:latin typeface="맑은 고딕"/>
+                <a:ea typeface="맑은 고딕"/>
+                <a:cs typeface="맑은 고딕"/>
               </a:rPr>
               <a:t>●  </a:t>
             </a:r>
@@ -5335,6 +5359,8 @@
                   <a:srgbClr val="222733"/>
                 </a:solidFill>
                 <a:latin typeface="맑은 고딕"/>
+                <a:ea typeface="맑은 고딕"/>
+                <a:cs typeface="맑은 고딕"/>
               </a:rPr>
               <a:t>4주차(Pod/Deployment)~7주차(Ingress/자가치유) 실습을 종합 정리해 제출</a:t>
             </a:r>
@@ -5370,6 +5396,8 @@
                   <a:srgbClr val="5B6373"/>
                 </a:solidFill>
                 <a:latin typeface="맑은 고딕"/>
+                <a:ea typeface="맑은 고딕"/>
+                <a:cs typeface="맑은 고딕"/>
               </a:rPr>
               <a:t>클라우드인프라관리  ·  7주차 3차시</a:t>
             </a:r>
@@ -5405,6 +5433,8 @@
                   <a:srgbClr val="5B6373"/>
                 </a:solidFill>
                 <a:latin typeface="맑은 고딕"/>
+                <a:ea typeface="맑은 고딕"/>
+                <a:cs typeface="맑은 고딕"/>
               </a:rPr>
               <a:t>10 / 12</a:t>
             </a:r>
@@ -5608,6 +5638,8 @@
                   <a:srgbClr val="14213D"/>
                 </a:solidFill>
                 <a:latin typeface="맑은 고딕"/>
+                <a:ea typeface="맑은 고딕"/>
+                <a:cs typeface="맑은 고딕"/>
               </a:rPr>
               <a:t>03</a:t>
             </a:r>
@@ -5643,6 +5675,8 @@
                   <a:srgbClr val="14B8A6"/>
                 </a:solidFill>
                 <a:latin typeface="맑은 고딕"/>
+                <a:ea typeface="맑은 고딕"/>
+                <a:cs typeface="맑은 고딕"/>
               </a:rPr>
               <a:t>PART 3 · 주차 정리</a:t>
             </a:r>
@@ -5678,6 +5712,8 @@
                   <a:srgbClr val="FFFFFF"/>
                 </a:solidFill>
                 <a:latin typeface="맑은 고딕"/>
+                <a:ea typeface="맑은 고딕"/>
+                <a:cs typeface="맑은 고딕"/>
               </a:rPr>
               <a:t>4~7주차 한눈에 정리</a:t>
             </a:r>
@@ -5757,6 +5793,8 @@
                   <a:srgbClr val="FFFFFF"/>
                 </a:solidFill>
                 <a:latin typeface="맑은 고딕"/>
+                <a:ea typeface="맑은 고딕"/>
+                <a:cs typeface="맑은 고딕"/>
               </a:rPr>
               <a:t>주차</a:t>
             </a:r>
@@ -5836,6 +5874,8 @@
                   <a:srgbClr val="FFFFFF"/>
                 </a:solidFill>
                 <a:latin typeface="맑은 고딕"/>
+                <a:ea typeface="맑은 고딕"/>
+                <a:cs typeface="맑은 고딕"/>
               </a:rPr>
               <a:t>핵심 오브젝트/개념</a:t>
             </a:r>
@@ -5915,6 +5955,8 @@
                   <a:srgbClr val="FFFFFF"/>
                 </a:solidFill>
                 <a:latin typeface="맑은 고딕"/>
+                <a:ea typeface="맑은 고딕"/>
+                <a:cs typeface="맑은 고딕"/>
               </a:rPr>
               <a:t>한 줄 요약</a:t>
             </a:r>
@@ -5994,6 +6036,8 @@
                   <a:srgbClr val="14213D"/>
                 </a:solidFill>
                 <a:latin typeface="맑은 고딕"/>
+                <a:ea typeface="맑은 고딕"/>
+                <a:cs typeface="맑은 고딕"/>
               </a:rPr>
               <a:t>4주차</a:t>
             </a:r>
@@ -6073,6 +6117,8 @@
                   <a:srgbClr val="222733"/>
                 </a:solidFill>
                 <a:latin typeface="맑은 고딕"/>
+                <a:ea typeface="맑은 고딕"/>
+                <a:cs typeface="맑은 고딕"/>
               </a:rPr>
               <a:t>Pod, Deployment</a:t>
             </a:r>
@@ -6152,6 +6198,8 @@
                   <a:srgbClr val="222733"/>
                 </a:solidFill>
                 <a:latin typeface="맑은 고딕"/>
+                <a:ea typeface="맑은 고딕"/>
+                <a:cs typeface="맑은 고딕"/>
               </a:rPr>
               <a:t>컨테이너를 감싸는 최소 단위 + 원하는 개수를 선언적으로 유지</a:t>
             </a:r>
@@ -6231,6 +6279,8 @@
                   <a:srgbClr val="14213D"/>
                 </a:solidFill>
                 <a:latin typeface="맑은 고딕"/>
+                <a:ea typeface="맑은 고딕"/>
+                <a:cs typeface="맑은 고딕"/>
               </a:rPr>
               <a:t>5주차</a:t>
             </a:r>
@@ -6310,6 +6360,8 @@
                   <a:srgbClr val="222733"/>
                 </a:solidFill>
                 <a:latin typeface="맑은 고딕"/>
+                <a:ea typeface="맑은 고딕"/>
+                <a:cs typeface="맑은 고딕"/>
               </a:rPr>
               <a:t>Service, Endpoints</a:t>
             </a:r>
@@ -6389,6 +6441,8 @@
                   <a:srgbClr val="222733"/>
                 </a:solidFill>
                 <a:latin typeface="맑은 고딕"/>
+                <a:ea typeface="맑은 고딕"/>
+                <a:cs typeface="맑은 고딕"/>
               </a:rPr>
               <a:t>Pod에 안정적인 접속 경로 제공 + 라운드로빈 분산</a:t>
             </a:r>
@@ -6468,6 +6522,8 @@
                   <a:srgbClr val="14213D"/>
                 </a:solidFill>
                 <a:latin typeface="맑은 고딕"/>
+                <a:ea typeface="맑은 고딕"/>
+                <a:cs typeface="맑은 고딕"/>
               </a:rPr>
               <a:t>6주차</a:t>
             </a:r>
@@ -6547,6 +6603,8 @@
                   <a:srgbClr val="222733"/>
                 </a:solidFill>
                 <a:latin typeface="맑은 고딕"/>
+                <a:ea typeface="맑은 고딕"/>
+                <a:cs typeface="맑은 고딕"/>
               </a:rPr>
               <a:t>ConfigMap/Secret, PV/PVC</a:t>
             </a:r>
@@ -6626,6 +6684,8 @@
                   <a:srgbClr val="222733"/>
                 </a:solidFill>
                 <a:latin typeface="맑은 고딕"/>
+                <a:ea typeface="맑은 고딕"/>
+                <a:cs typeface="맑은 고딕"/>
               </a:rPr>
               <a:t>설정·비밀정보 분리 + 데이터 영속성 확보</a:t>
             </a:r>
@@ -6705,6 +6765,8 @@
                   <a:srgbClr val="14213D"/>
                 </a:solidFill>
                 <a:latin typeface="맑은 고딕"/>
+                <a:ea typeface="맑은 고딕"/>
+                <a:cs typeface="맑은 고딕"/>
               </a:rPr>
               <a:t>7주차</a:t>
             </a:r>
@@ -6784,6 +6846,8 @@
                   <a:srgbClr val="222733"/>
                 </a:solidFill>
                 <a:latin typeface="맑은 고딕"/>
+                <a:ea typeface="맑은 고딕"/>
+                <a:cs typeface="맑은 고딕"/>
               </a:rPr>
               <a:t>Ingress, 자가치유</a:t>
             </a:r>
@@ -6863,6 +6927,8 @@
                   <a:srgbClr val="222733"/>
                 </a:solidFill>
                 <a:latin typeface="맑은 고딕"/>
+                <a:ea typeface="맑은 고딕"/>
+                <a:cs typeface="맑은 고딕"/>
               </a:rPr>
               <a:t>여러 서비스를 도메인으로 통합 + 장애 시 스스로 복구</a:t>
             </a:r>
@@ -6898,6 +6964,8 @@
                   <a:srgbClr val="5B6373"/>
                 </a:solidFill>
                 <a:latin typeface="맑은 고딕"/>
+                <a:ea typeface="맑은 고딕"/>
+                <a:cs typeface="맑은 고딕"/>
               </a:rPr>
               <a:t>클라우드인프라관리  ·  7주차 3차시</a:t>
             </a:r>
@@ -6933,6 +7001,8 @@
                   <a:srgbClr val="5B6373"/>
                 </a:solidFill>
                 <a:latin typeface="맑은 고딕"/>
+                <a:ea typeface="맑은 고딕"/>
+                <a:cs typeface="맑은 고딕"/>
               </a:rPr>
               <a:t>11 / 12</a:t>
             </a:r>
@@ -7118,6 +7188,8 @@
                   <a:srgbClr val="FFFFFF"/>
                 </a:solidFill>
                 <a:latin typeface="맑은 고딕"/>
+                <a:ea typeface="맑은 고딕"/>
+                <a:cs typeface="맑은 고딕"/>
               </a:rPr>
               <a:t>다음 주 예고</a:t>
             </a:r>
@@ -7153,6 +7225,8 @@
                   <a:srgbClr val="14B8A6"/>
                 </a:solidFill>
                 <a:latin typeface="맑은 고딕"/>
+                <a:ea typeface="맑은 고딕"/>
+                <a:cs typeface="맑은 고딕"/>
               </a:rPr>
               <a:t>다음 차시 예고 — 8주차 — 중간고사</a:t>
             </a:r>
@@ -7188,6 +7262,8 @@
                   <a:srgbClr val="FFFFFF"/>
                 </a:solidFill>
                 <a:latin typeface="맑은 고딕"/>
+                <a:ea typeface="맑은 고딕"/>
+                <a:cs typeface="맑은 고딕"/>
               </a:rPr>
               <a:t>1~3주차 Docker와 4~7주차 Kubernetes 전체 내용을 복습하고 온라인 중간고사를 치릅니다. 다음 시간까지 지금껏 제출한 실습 결과물을 스스로 복기해보세요.</a:t>
             </a:r>
@@ -7373,6 +7449,8 @@
                   <a:srgbClr val="14B8A6"/>
                 </a:solidFill>
                 <a:latin typeface="맑은 고딕"/>
+                <a:ea typeface="맑은 고딕"/>
+                <a:cs typeface="맑은 고딕"/>
               </a:rPr>
               <a:t>7주차, 그리고 Kubernetes 단원을 마치며</a:t>
             </a:r>
@@ -7408,6 +7486,8 @@
                   <a:srgbClr val="FFFFFF"/>
                 </a:solidFill>
                 <a:latin typeface="맑은 고딕"/>
+                <a:ea typeface="맑은 고딕"/>
+                <a:cs typeface="맑은 고딕"/>
               </a:rPr>
               <a:t>수고하셨습니다!</a:t>
             </a:r>
@@ -7447,6 +7527,8 @@
                   <a:srgbClr val="C9D3E6"/>
                 </a:solidFill>
                 <a:latin typeface="맑은 고딕"/>
+                <a:ea typeface="맑은 고딕"/>
+                <a:cs typeface="맑은 고딕"/>
               </a:rPr>
               <a:t>4주차부터 오늘까지, K8s의 핵심 오브젝트를 전부 직접 다뤄보셨습니다. 다음 주 중간고사 준비 잘 하시고, 좋은 결과 있길 바랍니다.</a:t>
             </a:r>
@@ -7588,6 +7670,8 @@
                   <a:srgbClr val="14B8A6"/>
                 </a:solidFill>
                 <a:latin typeface="맑은 고딕"/>
+                <a:ea typeface="맑은 고딕"/>
+                <a:cs typeface="맑은 고딕"/>
               </a:rPr>
               <a:t>SESSION OVERVIEW</a:t>
             </a:r>
@@ -7623,6 +7707,8 @@
                   <a:srgbClr val="FFFFFF"/>
                 </a:solidFill>
                 <a:latin typeface="맑은 고딕"/>
+                <a:ea typeface="맑은 고딕"/>
+                <a:cs typeface="맑은 고딕"/>
               </a:rPr>
               <a:t>오늘의 학습 목표</a:t>
             </a:r>
@@ -7662,6 +7748,8 @@
                   <a:srgbClr val="222733"/>
                 </a:solidFill>
                 <a:latin typeface="맑은 고딕"/>
+                <a:ea typeface="맑은 고딕"/>
+                <a:cs typeface="맑은 고딕"/>
               </a:rPr>
               <a:t>1.  K8s의 자가치유(Self-Healing)가 무엇인지 이해한다</a:t>
             </a:r>
@@ -7678,6 +7766,8 @@
                   <a:srgbClr val="222733"/>
                 </a:solidFill>
                 <a:latin typeface="맑은 고딕"/>
+                <a:ea typeface="맑은 고딕"/>
+                <a:cs typeface="맑은 고딕"/>
               </a:rPr>
               <a:t>2.  Pod를 강제로 삭제해 자동 복구 과정을 직접 관찰한다</a:t>
             </a:r>
@@ -7694,6 +7784,8 @@
                   <a:srgbClr val="222733"/>
                 </a:solidFill>
                 <a:latin typeface="맑은 고딕"/>
+                <a:ea typeface="맑은 고딕"/>
+                <a:cs typeface="맑은 고딕"/>
               </a:rPr>
               <a:t>3.  4~7주차에서 배운 K8s 핵심 오브젝트를 종합 정리한다</a:t>
             </a:r>
@@ -7729,6 +7821,8 @@
                   <a:srgbClr val="5B6373"/>
                 </a:solidFill>
                 <a:latin typeface="맑은 고딕"/>
+                <a:ea typeface="맑은 고딕"/>
+                <a:cs typeface="맑은 고딕"/>
               </a:rPr>
               <a:t>클라우드인프라관리  ·  7주차 3차시</a:t>
             </a:r>
@@ -7764,6 +7858,8 @@
                   <a:srgbClr val="5B6373"/>
                 </a:solidFill>
                 <a:latin typeface="맑은 고딕"/>
+                <a:ea typeface="맑은 고딕"/>
+                <a:cs typeface="맑은 고딕"/>
               </a:rPr>
               <a:t>02 / 12</a:t>
             </a:r>
@@ -7949,6 +8045,8 @@
                   <a:srgbClr val="14B8A6"/>
                 </a:solidFill>
                 <a:latin typeface="맑은 고딕"/>
+                <a:ea typeface="맑은 고딕"/>
+                <a:cs typeface="맑은 고딕"/>
               </a:rPr>
               <a:t>SESSION OVERVIEW</a:t>
             </a:r>
@@ -7984,6 +8082,8 @@
                   <a:srgbClr val="FFFFFF"/>
                 </a:solidFill>
                 <a:latin typeface="맑은 고딕"/>
+                <a:ea typeface="맑은 고딕"/>
+                <a:cs typeface="맑은 고딕"/>
               </a:rPr>
               <a:t>오늘의 진행 순서</a:t>
             </a:r>
@@ -8195,6 +8295,8 @@
                   <a:srgbClr val="FFFFFF"/>
                 </a:solidFill>
                 <a:latin typeface="맑은 고딕"/>
+                <a:ea typeface="맑은 고딕"/>
+                <a:cs typeface="맑은 고딕"/>
               </a:rPr>
               <a:t>1</a:t>
             </a:r>
@@ -8278,6 +8380,8 @@
                   <a:srgbClr val="14213D"/>
                 </a:solidFill>
                 <a:latin typeface="맑은 고딕"/>
+                <a:ea typeface="맑은 고딕"/>
+                <a:cs typeface="맑은 고딕"/>
               </a:rPr>
               <a:t>개념 설명</a:t>
             </a:r>
@@ -8317,6 +8421,8 @@
                   <a:srgbClr val="222733"/>
                 </a:solidFill>
                 <a:latin typeface="맑은 고딕"/>
+                <a:ea typeface="맑은 고딕"/>
+                <a:cs typeface="맑은 고딕"/>
               </a:rPr>
               <a:t>강의자료 기반 직접 강의</a:t>
             </a:r>
@@ -8396,6 +8502,8 @@
                   <a:srgbClr val="FFFFFF"/>
                 </a:solidFill>
                 <a:latin typeface="맑은 고딕"/>
+                <a:ea typeface="맑은 고딕"/>
+                <a:cs typeface="맑은 고딕"/>
               </a:rPr>
               <a:t>2</a:t>
             </a:r>
@@ -8479,6 +8587,8 @@
                   <a:srgbClr val="14213D"/>
                 </a:solidFill>
                 <a:latin typeface="맑은 고딕"/>
+                <a:ea typeface="맑은 고딕"/>
+                <a:cs typeface="맑은 고딕"/>
               </a:rPr>
               <a:t>Killercoda</a:t>
             </a:r>
@@ -8518,6 +8628,8 @@
                   <a:srgbClr val="222733"/>
                 </a:solidFill>
                 <a:latin typeface="맑은 고딕"/>
+                <a:ea typeface="맑은 고딕"/>
+                <a:cs typeface="맑은 고딕"/>
               </a:rPr>
               <a:t>자가치유 관찰 실습</a:t>
             </a:r>
@@ -8597,6 +8709,8 @@
                   <a:srgbClr val="FFFFFF"/>
                 </a:solidFill>
                 <a:latin typeface="맑은 고딕"/>
+                <a:ea typeface="맑은 고딕"/>
+                <a:cs typeface="맑은 고딕"/>
               </a:rPr>
               <a:t>3</a:t>
             </a:r>
@@ -8680,6 +8794,8 @@
                   <a:srgbClr val="14213D"/>
                 </a:solidFill>
                 <a:latin typeface="맑은 고딕"/>
+                <a:ea typeface="맑은 고딕"/>
+                <a:cs typeface="맑은 고딕"/>
               </a:rPr>
               <a:t>VM 안내</a:t>
             </a:r>
@@ -8719,6 +8835,8 @@
                   <a:srgbClr val="222733"/>
                 </a:solidFill>
                 <a:latin typeface="맑은 고딕"/>
+                <a:ea typeface="맑은 고딕"/>
+                <a:cs typeface="맑은 고딕"/>
               </a:rPr>
               <a:t>VM에서 동일 실습</a:t>
             </a:r>
@@ -8798,6 +8916,8 @@
                   <a:srgbClr val="FFFFFF"/>
                 </a:solidFill>
                 <a:latin typeface="맑은 고딕"/>
+                <a:ea typeface="맑은 고딕"/>
+                <a:cs typeface="맑은 고딕"/>
               </a:rPr>
               <a:t>4</a:t>
             </a:r>
@@ -8881,6 +9001,8 @@
                   <a:srgbClr val="14213D"/>
                 </a:solidFill>
                 <a:latin typeface="맑은 고딕"/>
+                <a:ea typeface="맑은 고딕"/>
+                <a:cs typeface="맑은 고딕"/>
               </a:rPr>
               <a:t>결과 제출</a:t>
             </a:r>
@@ -8920,6 +9042,8 @@
                   <a:srgbClr val="222733"/>
                 </a:solidFill>
                 <a:latin typeface="맑은 고딕"/>
+                <a:ea typeface="맑은 고딕"/>
+                <a:cs typeface="맑은 고딕"/>
               </a:rPr>
               <a:t>4~7주 종합 제출</a:t>
             </a:r>
@@ -8955,6 +9079,8 @@
                   <a:srgbClr val="5B6373"/>
                 </a:solidFill>
                 <a:latin typeface="맑은 고딕"/>
+                <a:ea typeface="맑은 고딕"/>
+                <a:cs typeface="맑은 고딕"/>
               </a:rPr>
               <a:t>클라우드인프라관리  ·  7주차 3차시</a:t>
             </a:r>
@@ -8990,6 +9116,8 @@
                   <a:srgbClr val="5B6373"/>
                 </a:solidFill>
                 <a:latin typeface="맑은 고딕"/>
+                <a:ea typeface="맑은 고딕"/>
+                <a:cs typeface="맑은 고딕"/>
               </a:rPr>
               <a:t>03 / 12</a:t>
             </a:r>
@@ -9193,6 +9321,8 @@
                   <a:srgbClr val="14213D"/>
                 </a:solidFill>
                 <a:latin typeface="맑은 고딕"/>
+                <a:ea typeface="맑은 고딕"/>
+                <a:cs typeface="맑은 고딕"/>
               </a:rPr>
               <a:t>PART 01</a:t>
             </a:r>
@@ -9228,6 +9358,8 @@
                   <a:srgbClr val="FFFFFF"/>
                 </a:solidFill>
                 <a:latin typeface="맑은 고딕"/>
+                <a:ea typeface="맑은 고딕"/>
+                <a:cs typeface="맑은 고딕"/>
               </a:rPr>
               <a:t>K8s의 자가치유란?</a:t>
             </a:r>
@@ -9263,6 +9395,8 @@
                   <a:srgbClr val="C9D3E6"/>
                 </a:solidFill>
                 <a:latin typeface="맑은 고딕"/>
+                <a:ea typeface="맑은 고딕"/>
+                <a:cs typeface="맑은 고딕"/>
               </a:rPr>
               <a:t>선언한 상태를 스스로 지켜낸다</a:t>
             </a:r>
@@ -9422,6 +9556,8 @@
                   <a:srgbClr val="14213D"/>
                 </a:solidFill>
                 <a:latin typeface="맑은 고딕"/>
+                <a:ea typeface="맑은 고딕"/>
+                <a:cs typeface="맑은 고딕"/>
               </a:rPr>
               <a:t>01</a:t>
             </a:r>
@@ -9457,6 +9593,8 @@
                   <a:srgbClr val="14B8A6"/>
                 </a:solidFill>
                 <a:latin typeface="맑은 고딕"/>
+                <a:ea typeface="맑은 고딕"/>
+                <a:cs typeface="맑은 고딕"/>
               </a:rPr>
               <a:t>PART 1 · 자가치유란?</a:t>
             </a:r>
@@ -9492,6 +9630,8 @@
                   <a:srgbClr val="FFFFFF"/>
                 </a:solidFill>
                 <a:latin typeface="맑은 고딕"/>
+                <a:ea typeface="맑은 고딕"/>
+                <a:cs typeface="맑은 고딕"/>
               </a:rPr>
               <a:t>"원하는 상태"를 선언하면 K8s가 지킨다</a:t>
             </a:r>
@@ -9531,6 +9671,8 @@
                   <a:srgbClr val="0D9488"/>
                 </a:solidFill>
                 <a:latin typeface="맑은 고딕"/>
+                <a:ea typeface="맑은 고딕"/>
+                <a:cs typeface="맑은 고딕"/>
               </a:rPr>
               <a:t>●  </a:t>
             </a:r>
@@ -9540,6 +9682,8 @@
                   <a:srgbClr val="222733"/>
                 </a:solidFill>
                 <a:latin typeface="맑은 고딕"/>
+                <a:ea typeface="맑은 고딕"/>
+                <a:cs typeface="맑은 고딕"/>
               </a:rPr>
               <a:t>4주차에서 배운 Deployment는 '몇 개의 Pod를 유지할지'를 선언적으로 명시함</a:t>
             </a:r>
@@ -9556,6 +9700,8 @@
                   <a:srgbClr val="0D9488"/>
                 </a:solidFill>
                 <a:latin typeface="맑은 고딕"/>
+                <a:ea typeface="맑은 고딕"/>
+                <a:cs typeface="맑은 고딕"/>
               </a:rPr>
               <a:t>●  </a:t>
             </a:r>
@@ -9565,6 +9711,8 @@
                   <a:srgbClr val="222733"/>
                 </a:solidFill>
                 <a:latin typeface="맑은 고딕"/>
+                <a:ea typeface="맑은 고딕"/>
+                <a:cs typeface="맑은 고딕"/>
               </a:rPr>
               <a:t>K8s는 이 선언된 상태와 실제 상태를 계속 비교하며, 다르면 스스로 맞춰나감</a:t>
             </a:r>
@@ -9581,6 +9729,8 @@
                   <a:srgbClr val="0D9488"/>
                 </a:solidFill>
                 <a:latin typeface="맑은 고딕"/>
+                <a:ea typeface="맑은 고딕"/>
+                <a:cs typeface="맑은 고딕"/>
               </a:rPr>
               <a:t>●  </a:t>
             </a:r>
@@ -9590,6 +9740,8 @@
                   <a:srgbClr val="222733"/>
                 </a:solidFill>
                 <a:latin typeface="맑은 고딕"/>
+                <a:ea typeface="맑은 고딕"/>
+                <a:cs typeface="맑은 고딕"/>
               </a:rPr>
               <a:t>Pod가 죽거나 삭제되면, K8s가 즉시 감지하고 새 Pod를 자동으로 생성함</a:t>
             </a:r>
@@ -9669,6 +9821,8 @@
                   <a:srgbClr val="FFFFFF"/>
                 </a:solidFill>
                 <a:latin typeface="맑은 고딕"/>
+                <a:ea typeface="맑은 고딕"/>
+                <a:cs typeface="맑은 고딕"/>
               </a:rPr>
               <a:t>🔁  이것이 바로 자가치유(Self-Healing)</a:t>
             </a:r>
@@ -9704,6 +9858,8 @@
                   <a:srgbClr val="FFFFFF"/>
                 </a:solidFill>
                 <a:latin typeface="맑은 고딕"/>
+                <a:ea typeface="맑은 고딕"/>
+                <a:cs typeface="맑은 고딕"/>
               </a:rPr>
               <a:t>사람이 일일이 재시작시킬 필요 없이, K8s가 알아서 '원하는 상태'로 복구한다</a:t>
             </a:r>
@@ -9739,6 +9895,8 @@
                   <a:srgbClr val="5B6373"/>
                 </a:solidFill>
                 <a:latin typeface="맑은 고딕"/>
+                <a:ea typeface="맑은 고딕"/>
+                <a:cs typeface="맑은 고딕"/>
               </a:rPr>
               <a:t>클라우드인프라관리  ·  7주차 3차시</a:t>
             </a:r>
@@ -9774,6 +9932,8 @@
                   <a:srgbClr val="5B6373"/>
                 </a:solidFill>
                 <a:latin typeface="맑은 고딕"/>
+                <a:ea typeface="맑은 고딕"/>
+                <a:cs typeface="맑은 고딕"/>
               </a:rPr>
               <a:t>05 / 12</a:t>
             </a:r>
@@ -9977,6 +10137,8 @@
                   <a:srgbClr val="14213D"/>
                 </a:solidFill>
                 <a:latin typeface="맑은 고딕"/>
+                <a:ea typeface="맑은 고딕"/>
+                <a:cs typeface="맑은 고딕"/>
               </a:rPr>
               <a:t>PART 02</a:t>
             </a:r>
@@ -10012,6 +10174,8 @@
                   <a:srgbClr val="FFFFFF"/>
                 </a:solidFill>
                 <a:latin typeface="맑은 고딕"/>
+                <a:ea typeface="맑은 고딕"/>
+                <a:cs typeface="맑은 고딕"/>
               </a:rPr>
               <a:t>자가치유 직접 확인하기</a:t>
             </a:r>
@@ -10047,6 +10211,8 @@
                   <a:srgbClr val="C9D3E6"/>
                 </a:solidFill>
                 <a:latin typeface="맑은 고딕"/>
+                <a:ea typeface="맑은 고딕"/>
+                <a:cs typeface="맑은 고딕"/>
               </a:rPr>
               <a:t>Pod를 지워도 다시 살아난다</a:t>
             </a:r>
@@ -10206,6 +10372,8 @@
                   <a:srgbClr val="14213D"/>
                 </a:solidFill>
                 <a:latin typeface="맑은 고딕"/>
+                <a:ea typeface="맑은 고딕"/>
+                <a:cs typeface="맑은 고딕"/>
               </a:rPr>
               <a:t>02</a:t>
             </a:r>
@@ -10241,6 +10409,8 @@
                   <a:srgbClr val="14B8A6"/>
                 </a:solidFill>
                 <a:latin typeface="맑은 고딕"/>
+                <a:ea typeface="맑은 고딕"/>
+                <a:cs typeface="맑은 고딕"/>
               </a:rPr>
               <a:t>PART 2 · 자가치유 확인</a:t>
             </a:r>
@@ -10276,6 +10446,8 @@
                   <a:srgbClr val="FFFFFF"/>
                 </a:solidFill>
                 <a:latin typeface="맑은 고딕"/>
+                <a:ea typeface="맑은 고딕"/>
+                <a:cs typeface="맑은 고딕"/>
               </a:rPr>
               <a:t>실시간 모니터링하며 삭제해보기</a:t>
             </a:r>
@@ -10315,6 +10487,8 @@
                   <a:srgbClr val="0D9488"/>
                 </a:solidFill>
                 <a:latin typeface="맑은 고딕"/>
+                <a:ea typeface="맑은 고딕"/>
+                <a:cs typeface="맑은 고딕"/>
               </a:rPr>
               <a:t>●  </a:t>
             </a:r>
@@ -10324,6 +10498,8 @@
                   <a:srgbClr val="222733"/>
                 </a:solidFill>
                 <a:latin typeface="맑은 고딕"/>
+                <a:ea typeface="맑은 고딕"/>
+                <a:cs typeface="맑은 고딕"/>
               </a:rPr>
               <a:t>kubectl get pods -w &amp; 로 Pod 상태를 실시간으로 지켜봄</a:t>
             </a:r>
@@ -10340,6 +10516,8 @@
                   <a:srgbClr val="0D9488"/>
                 </a:solidFill>
                 <a:latin typeface="맑은 고딕"/>
+                <a:ea typeface="맑은 고딕"/>
+                <a:cs typeface="맑은 고딕"/>
               </a:rPr>
               <a:t>●  </a:t>
             </a:r>
@@ -10349,6 +10527,8 @@
                   <a:srgbClr val="222733"/>
                 </a:solidFill>
                 <a:latin typeface="맑은 고딕"/>
+                <a:ea typeface="맑은 고딕"/>
+                <a:cs typeface="맑은 고딕"/>
               </a:rPr>
               <a:t>다른 터미널에서 kubectl delete pod {pod-name} 으로 강제 삭제</a:t>
             </a:r>
@@ -10365,6 +10545,8 @@
                   <a:srgbClr val="0D9488"/>
                 </a:solidFill>
                 <a:latin typeface="맑은 고딕"/>
+                <a:ea typeface="맑은 고딕"/>
+                <a:cs typeface="맑은 고딕"/>
               </a:rPr>
               <a:t>●  </a:t>
             </a:r>
@@ -10374,6 +10556,8 @@
                   <a:srgbClr val="222733"/>
                 </a:solidFill>
                 <a:latin typeface="맑은 고딕"/>
+                <a:ea typeface="맑은 고딕"/>
+                <a:cs typeface="맑은 고딕"/>
               </a:rPr>
               <a:t>삭제된 즉시 K8s가 새 Pod를 자동 생성하는 과정이 화면에 그대로 나타남</a:t>
             </a:r>
@@ -10409,6 +10593,8 @@
                   <a:srgbClr val="14213D"/>
                 </a:solidFill>
                 <a:latin typeface="맑은 고딕"/>
+                <a:ea typeface="맑은 고딕"/>
+                <a:cs typeface="맑은 고딕"/>
               </a:rPr>
               <a:t>실습 명령어 흐름</a:t>
             </a:r>
@@ -10488,6 +10674,8 @@
                   <a:srgbClr val="FFFFFF"/>
                 </a:solidFill>
                 <a:latin typeface="맑은 고딕"/>
+                <a:ea typeface="맑은 고딕"/>
+                <a:cs typeface="맑은 고딕"/>
               </a:rPr>
               <a:t>kubectl get pods -w &amp;</a:t>
             </a:r>
@@ -10567,6 +10755,8 @@
                   <a:srgbClr val="FFFFFF"/>
                 </a:solidFill>
                 <a:latin typeface="맑은 고딕"/>
+                <a:ea typeface="맑은 고딕"/>
+                <a:cs typeface="맑은 고딕"/>
               </a:rPr>
               <a:t>kubectl delete pod {pod-name}</a:t>
             </a:r>
@@ -10646,6 +10836,8 @@
                   <a:srgbClr val="FFFFFF"/>
                 </a:solidFill>
                 <a:latin typeface="맑은 고딕"/>
+                <a:ea typeface="맑은 고딕"/>
+                <a:cs typeface="맑은 고딕"/>
               </a:rPr>
               <a:t>→ Terminating → 자동 재생성 → Running</a:t>
             </a:r>
@@ -10681,6 +10873,8 @@
                   <a:srgbClr val="5B6373"/>
                 </a:solidFill>
                 <a:latin typeface="맑은 고딕"/>
+                <a:ea typeface="맑은 고딕"/>
+                <a:cs typeface="맑은 고딕"/>
               </a:rPr>
               <a:t>클라우드인프라관리  ·  7주차 3차시</a:t>
             </a:r>
@@ -10716,6 +10910,8 @@
                   <a:srgbClr val="5B6373"/>
                 </a:solidFill>
                 <a:latin typeface="맑은 고딕"/>
+                <a:ea typeface="맑은 고딕"/>
+                <a:cs typeface="맑은 고딕"/>
               </a:rPr>
               <a:t>07 / 12</a:t>
             </a:r>
@@ -10919,6 +11115,8 @@
                   <a:srgbClr val="14213D"/>
                 </a:solidFill>
                 <a:latin typeface="맑은 고딕"/>
+                <a:ea typeface="맑은 고딕"/>
+                <a:cs typeface="맑은 고딕"/>
               </a:rPr>
               <a:t>02</a:t>
             </a:r>
@@ -10954,6 +11152,8 @@
                   <a:srgbClr val="14B8A6"/>
                 </a:solidFill>
                 <a:latin typeface="맑은 고딕"/>
+                <a:ea typeface="맑은 고딕"/>
+                <a:cs typeface="맑은 고딕"/>
               </a:rPr>
               <a:t>PART 2 · 자가치유 확인</a:t>
             </a:r>
@@ -10989,6 +11189,8 @@
                   <a:srgbClr val="FFFFFF"/>
                 </a:solidFill>
                 <a:latin typeface="맑은 고딕"/>
+                <a:ea typeface="맑은 고딕"/>
+                <a:cs typeface="맑은 고딕"/>
               </a:rPr>
               <a:t>6주차 연결 — 데이터도 함께 지켜진다</a:t>
             </a:r>
@@ -11028,6 +11230,8 @@
                   <a:srgbClr val="0D9488"/>
                 </a:solidFill>
                 <a:latin typeface="맑은 고딕"/>
+                <a:ea typeface="맑은 고딕"/>
+                <a:cs typeface="맑은 고딕"/>
               </a:rPr>
               <a:t>●  </a:t>
             </a:r>
@@ -11037,6 +11241,8 @@
                   <a:srgbClr val="222733"/>
                 </a:solidFill>
                 <a:latin typeface="맑은 고딕"/>
+                <a:ea typeface="맑은 고딕"/>
+                <a:cs typeface="맑은 고딕"/>
               </a:rPr>
               <a:t>6주차에서 PV/PVC로 MySQL 데이터가 Pod 재생성 후에도 유지됨을 확인했음</a:t>
             </a:r>
@@ -11053,6 +11259,8 @@
                   <a:srgbClr val="0D9488"/>
                 </a:solidFill>
                 <a:latin typeface="맑은 고딕"/>
+                <a:ea typeface="맑은 고딕"/>
+                <a:cs typeface="맑은 고딕"/>
               </a:rPr>
               <a:t>●  </a:t>
             </a:r>
@@ -11062,6 +11270,8 @@
                   <a:srgbClr val="222733"/>
                 </a:solidFill>
                 <a:latin typeface="맑은 고딕"/>
+                <a:ea typeface="맑은 고딕"/>
+                <a:cs typeface="맑은 고딕"/>
               </a:rPr>
               <a:t>자가치유(Pod 재생성) + 데이터 영속성(PV/PVC)이 합쳐지면, 장애가 나도 서비스가 데이터 손실 없이 스스로 복구됨</a:t>
             </a:r>
@@ -11078,6 +11288,8 @@
                   <a:srgbClr val="0D9488"/>
                 </a:solidFill>
                 <a:latin typeface="맑은 고딕"/>
+                <a:ea typeface="맑은 고딕"/>
+                <a:cs typeface="맑은 고딕"/>
               </a:rPr>
               <a:t>●  </a:t>
             </a:r>
@@ -11087,6 +11299,8 @@
                   <a:srgbClr val="222733"/>
                 </a:solidFill>
                 <a:latin typeface="맑은 고딕"/>
+                <a:ea typeface="맑은 고딕"/>
+                <a:cs typeface="맑은 고딕"/>
               </a:rPr>
               <a:t>이것이 K8s를 실무에서 쓰는 핵심 이유 중 하나</a:t>
             </a:r>
@@ -11122,6 +11336,8 @@
                   <a:srgbClr val="5B6373"/>
                 </a:solidFill>
                 <a:latin typeface="맑은 고딕"/>
+                <a:ea typeface="맑은 고딕"/>
+                <a:cs typeface="맑은 고딕"/>
               </a:rPr>
               <a:t>클라우드인프라관리  ·  7주차 3차시</a:t>
             </a:r>
@@ -11157,6 +11373,8 @@
                   <a:srgbClr val="5B6373"/>
                 </a:solidFill>
                 <a:latin typeface="맑은 고딕"/>
+                <a:ea typeface="맑은 고딕"/>
+                <a:cs typeface="맑은 고딕"/>
               </a:rPr>
               <a:t>08 / 12</a:t>
             </a:r>
@@ -11360,6 +11578,8 @@
                   <a:srgbClr val="14213D"/>
                 </a:solidFill>
                 <a:latin typeface="맑은 고딕"/>
+                <a:ea typeface="맑은 고딕"/>
+                <a:cs typeface="맑은 고딕"/>
               </a:rPr>
               <a:t>03</a:t>
             </a:r>
@@ -11395,6 +11615,8 @@
                   <a:srgbClr val="14B8A6"/>
                 </a:solidFill>
                 <a:latin typeface="맑은 고딕"/>
+                <a:ea typeface="맑은 고딕"/>
+                <a:cs typeface="맑은 고딕"/>
               </a:rPr>
               <a:t>실습 안내</a:t>
             </a:r>
@@ -11430,6 +11652,8 @@
                   <a:srgbClr val="FFFFFF"/>
                 </a:solidFill>
                 <a:latin typeface="맑은 고딕"/>
+                <a:ea typeface="맑은 고딕"/>
+                <a:cs typeface="맑은 고딕"/>
               </a:rPr>
               <a:t>Killercoda — 자가치유 관찰 실습</a:t>
             </a:r>
@@ -11469,6 +11693,8 @@
                   <a:srgbClr val="0D9488"/>
                 </a:solidFill>
                 <a:latin typeface="맑은 고딕"/>
+                <a:ea typeface="맑은 고딕"/>
+                <a:cs typeface="맑은 고딕"/>
               </a:rPr>
               <a:t>●  </a:t>
             </a:r>
@@ -11478,6 +11704,8 @@
                   <a:srgbClr val="222733"/>
                 </a:solidFill>
                 <a:latin typeface="맑은 고딕"/>
+                <a:ea typeface="맑은 고딕"/>
+                <a:cs typeface="맑은 고딕"/>
               </a:rPr>
               <a:t>kubectl get pods -w &amp; 로 실시간 모니터링 시작</a:t>
             </a:r>
@@ -11494,6 +11722,8 @@
                   <a:srgbClr val="0D9488"/>
                 </a:solidFill>
                 <a:latin typeface="맑은 고딕"/>
+                <a:ea typeface="맑은 고딕"/>
+                <a:cs typeface="맑은 고딕"/>
               </a:rPr>
               <a:t>●  </a:t>
             </a:r>
@@ -11503,6 +11733,8 @@
                   <a:srgbClr val="222733"/>
                 </a:solidFill>
                 <a:latin typeface="맑은 고딕"/>
+                <a:ea typeface="맑은 고딕"/>
+                <a:cs typeface="맑은 고딕"/>
               </a:rPr>
               <a:t>kubectl delete pod {pod-name} 으로 임의의 Pod 강제 삭제</a:t>
             </a:r>
@@ -11519,6 +11751,8 @@
                   <a:srgbClr val="0D9488"/>
                 </a:solidFill>
                 <a:latin typeface="맑은 고딕"/>
+                <a:ea typeface="맑은 고딕"/>
+                <a:cs typeface="맑은 고딕"/>
               </a:rPr>
               <a:t>●  </a:t>
             </a:r>
@@ -11528,6 +11762,8 @@
                   <a:srgbClr val="222733"/>
                 </a:solidFill>
                 <a:latin typeface="맑은 고딕"/>
+                <a:ea typeface="맑은 고딕"/>
+                <a:cs typeface="맑은 고딕"/>
               </a:rPr>
               <a:t>Terminating → 새 Pod 생성 → Running 까지의 과정을 화면으로 관찰 및 캡처</a:t>
             </a:r>
@@ -11563,6 +11799,8 @@
                   <a:srgbClr val="5B6373"/>
                 </a:solidFill>
                 <a:latin typeface="맑은 고딕"/>
+                <a:ea typeface="맑은 고딕"/>
+                <a:cs typeface="맑은 고딕"/>
               </a:rPr>
               <a:t>클라우드인프라관리  ·  7주차 3차시</a:t>
             </a:r>
@@ -11598,6 +11836,8 @@
                   <a:srgbClr val="5B6373"/>
                 </a:solidFill>
                 <a:latin typeface="맑은 고딕"/>
+                <a:ea typeface="맑은 고딕"/>
+                <a:cs typeface="맑은 고딕"/>
               </a:rPr>
               <a:t>09 / 12</a:t>
             </a:r>
